--- a/HTML_Fundamentals/decks/Lesson2_Text_Lists_Links_Images.pptx
+++ b/HTML_Fundamentals/decks/Lesson2_Text_Lists_Links_Images.pptx
@@ -120,21 +120,21 @@
   <p:extLst>
     <p:ext uri="{521415D9-36F7-43E2-AB2F-B90AF26B5E84}">
       <p14:sectionLst xmlns:p14="http://schemas.microsoft.com/office/powerpoint/2010/main">
-        <p14:section name="Opening" id="{cc55021a-3b26-f141-f759-874a919bccfb}">
+        <p14:section name="Opening" id="{be3291b1-242a-821c-5fde-d2fb3000d0e3}">
           <p14:sldIdLst>
             <p14:sldId id="256"/>
             <p14:sldId id="257"/>
             <p14:sldId id="258"/>
           </p14:sldIdLst>
         </p14:section>
-        <p14:section name="Text &amp; lists" id="{37b7be24-5748-e015-129e-4601dbe6ded6}">
+        <p14:section name="Text &amp; lists" id="{538150f2-5026-f8df-6435-426f2cee9b14}">
           <p14:sldIdLst>
             <p14:sldId id="259"/>
             <p14:sldId id="260"/>
             <p14:sldId id="261"/>
           </p14:sldIdLst>
         </p14:section>
-        <p14:section name="Links &amp; images" id="{357d6177-64bb-c7fe-0936-76002d8bd76a}">
+        <p14:section name="Links &amp; images" id="{c99e9da5-93b4-f908-5290-aae404f31595}">
           <p14:sldIdLst>
             <p14:sldId id="262"/>
             <p14:sldId id="263"/>
